--- a/ゲーム科1年/01_後期/ゲームエンジンⅡ/05_マルチシーン.pptx
+++ b/ゲーム科1年/01_後期/ゲームエンジンⅡ/05_マルチシーン.pptx
@@ -268,7 +268,7 @@
           <a:p>
             <a:fld id="{E9CC885B-4903-4D54-9A93-00025F12DED9}" type="datetimeFigureOut">
               <a:rPr kumimoji="1" lang="ja-JP" altLang="en-US" smtClean="0"/>
-              <a:t>2024/11/5</a:t>
+              <a:t>2025/3/5</a:t>
             </a:fld>
             <a:endParaRPr kumimoji="1" lang="ja-JP" altLang="en-US"/>
           </a:p>
@@ -498,7 +498,7 @@
           <a:p>
             <a:fld id="{E9CC885B-4903-4D54-9A93-00025F12DED9}" type="datetimeFigureOut">
               <a:rPr kumimoji="1" lang="ja-JP" altLang="en-US" smtClean="0"/>
-              <a:t>2024/11/5</a:t>
+              <a:t>2025/3/5</a:t>
             </a:fld>
             <a:endParaRPr kumimoji="1" lang="ja-JP" altLang="en-US"/>
           </a:p>
@@ -738,7 +738,7 @@
           <a:p>
             <a:fld id="{E9CC885B-4903-4D54-9A93-00025F12DED9}" type="datetimeFigureOut">
               <a:rPr kumimoji="1" lang="ja-JP" altLang="en-US" smtClean="0"/>
-              <a:t>2024/11/5</a:t>
+              <a:t>2025/3/5</a:t>
             </a:fld>
             <a:endParaRPr kumimoji="1" lang="ja-JP" altLang="en-US"/>
           </a:p>
@@ -968,7 +968,7 @@
           <a:p>
             <a:fld id="{E9CC885B-4903-4D54-9A93-00025F12DED9}" type="datetimeFigureOut">
               <a:rPr kumimoji="1" lang="ja-JP" altLang="en-US" smtClean="0"/>
-              <a:t>2024/11/5</a:t>
+              <a:t>2025/3/5</a:t>
             </a:fld>
             <a:endParaRPr kumimoji="1" lang="ja-JP" altLang="en-US"/>
           </a:p>
@@ -1243,7 +1243,7 @@
           <a:p>
             <a:fld id="{E9CC885B-4903-4D54-9A93-00025F12DED9}" type="datetimeFigureOut">
               <a:rPr kumimoji="1" lang="ja-JP" altLang="en-US" smtClean="0"/>
-              <a:t>2024/11/5</a:t>
+              <a:t>2025/3/5</a:t>
             </a:fld>
             <a:endParaRPr kumimoji="1" lang="ja-JP" altLang="en-US"/>
           </a:p>
@@ -1572,7 +1572,7 @@
           <a:p>
             <a:fld id="{E9CC885B-4903-4D54-9A93-00025F12DED9}" type="datetimeFigureOut">
               <a:rPr kumimoji="1" lang="ja-JP" altLang="en-US" smtClean="0"/>
-              <a:t>2024/11/5</a:t>
+              <a:t>2025/3/5</a:t>
             </a:fld>
             <a:endParaRPr kumimoji="1" lang="ja-JP" altLang="en-US"/>
           </a:p>
@@ -2048,7 +2048,7 @@
           <a:p>
             <a:fld id="{E9CC885B-4903-4D54-9A93-00025F12DED9}" type="datetimeFigureOut">
               <a:rPr kumimoji="1" lang="ja-JP" altLang="en-US" smtClean="0"/>
-              <a:t>2024/11/5</a:t>
+              <a:t>2025/3/5</a:t>
             </a:fld>
             <a:endParaRPr kumimoji="1" lang="ja-JP" altLang="en-US"/>
           </a:p>
@@ -2189,7 +2189,7 @@
           <a:p>
             <a:fld id="{E9CC885B-4903-4D54-9A93-00025F12DED9}" type="datetimeFigureOut">
               <a:rPr kumimoji="1" lang="ja-JP" altLang="en-US" smtClean="0"/>
-              <a:t>2024/11/5</a:t>
+              <a:t>2025/3/5</a:t>
             </a:fld>
             <a:endParaRPr kumimoji="1" lang="ja-JP" altLang="en-US"/>
           </a:p>
@@ -2302,7 +2302,7 @@
           <a:p>
             <a:fld id="{E9CC885B-4903-4D54-9A93-00025F12DED9}" type="datetimeFigureOut">
               <a:rPr kumimoji="1" lang="ja-JP" altLang="en-US" smtClean="0"/>
-              <a:t>2024/11/5</a:t>
+              <a:t>2025/3/5</a:t>
             </a:fld>
             <a:endParaRPr kumimoji="1" lang="ja-JP" altLang="en-US"/>
           </a:p>
@@ -2645,7 +2645,7 @@
           <a:p>
             <a:fld id="{E9CC885B-4903-4D54-9A93-00025F12DED9}" type="datetimeFigureOut">
               <a:rPr kumimoji="1" lang="ja-JP" altLang="en-US" smtClean="0"/>
-              <a:t>2024/11/5</a:t>
+              <a:t>2025/3/5</a:t>
             </a:fld>
             <a:endParaRPr kumimoji="1" lang="ja-JP" altLang="en-US"/>
           </a:p>
@@ -2933,7 +2933,7 @@
           <a:p>
             <a:fld id="{E9CC885B-4903-4D54-9A93-00025F12DED9}" type="datetimeFigureOut">
               <a:rPr kumimoji="1" lang="ja-JP" altLang="en-US" smtClean="0"/>
-              <a:t>2024/11/5</a:t>
+              <a:t>2025/3/5</a:t>
             </a:fld>
             <a:endParaRPr kumimoji="1" lang="ja-JP" altLang="en-US"/>
           </a:p>
@@ -3206,7 +3206,7 @@
           <a:p>
             <a:fld id="{E9CC885B-4903-4D54-9A93-00025F12DED9}" type="datetimeFigureOut">
               <a:rPr kumimoji="1" lang="ja-JP" altLang="en-US" smtClean="0"/>
-              <a:t>2024/11/5</a:t>
+              <a:t>2025/3/5</a:t>
             </a:fld>
             <a:endParaRPr kumimoji="1" lang="ja-JP" altLang="en-US"/>
           </a:p>
@@ -3721,7 +3721,7 @@
           <a:p>
             <a:r>
               <a:rPr kumimoji="1" lang="ja-JP" altLang="en-US" sz="2400" dirty="0"/>
-              <a:t>用途は様々ですが、簡単な例を練習してみましょう。</a:t>
+              <a:t>用途は様々ですが、簡単な例で練習してみましょう。</a:t>
             </a:r>
             <a:endParaRPr kumimoji="1" lang="en-US" altLang="ja-JP" sz="2400" dirty="0"/>
           </a:p>
